--- a/docs/samples/Brightwater_Home_Loans_PCR.pptx
+++ b/docs/samples/Brightwater_Home_Loans_PCR.pptx
@@ -8190,7 +8190,7 @@
                 <a:gridCol w="1577295"/>
                 <a:gridCol w="1577295"/>
               </a:tblGrid>
-              <a:tr h="0">
+              <a:tr h="274320">
                 <a:tc>
                   <a:txBody>
                     <a:bodyPr/>
@@ -8328,7 +8328,7 @@
                   </a:tcPr>
                 </a:tc>
               </a:tr>
-              <a:tr h="0">
+              <a:tr h="274320">
                 <a:tc>
                   <a:txBody>
                     <a:bodyPr/>
